--- a/rag_opencv_v2.pptx
+++ b/rag_opencv_v2.pptx
@@ -3138,7 +3138,7 @@
           <a:p>
             <a:pPr algn="l"/>
             <a:r>
-              <a:rPr sz="1350" b="0" i="0">
+              <a:rPr sz="1200" b="1" i="0">
                 <a:solidFill>
                   <a:srgbClr val="D1D5D8"/>
                 </a:solidFill>
@@ -3146,7 +3146,7 @@
               </a:rPr>
               <a:t>14</a:t>
             </a:r>
-            <a:endParaRPr sz="1200" b="0" i="0">
+            <a:endParaRPr sz="1200" b="1" i="0">
               <a:latin typeface="DejaVu Sans"/>
             </a:endParaRPr>
           </a:p>
@@ -3176,7 +3176,7 @@
           <a:p>
             <a:pPr algn="l"/>
             <a:r>
-              <a:rPr sz="1200" b="0" i="0">
+              <a:rPr sz="1100" b="1" i="0">
                 <a:solidFill>
                   <a:srgbClr val="CBCED5"/>
                 </a:solidFill>
@@ -3184,7 +3184,7 @@
               </a:rPr>
               <a:t>15</a:t>
             </a:r>
-            <a:endParaRPr sz="1100" b="0" i="0">
+            <a:endParaRPr sz="1100" b="1" i="0">
               <a:latin typeface="DejaVu Sans"/>
             </a:endParaRPr>
           </a:p>
@@ -3214,13 +3214,317 @@
           <a:p>
             <a:pPr algn="l"/>
             <a:r>
-              <a:rPr sz="1150" b="0" i="0">
+              <a:rPr sz="1000" b="1" i="0">
                 <a:solidFill>
                   <a:srgbClr val="75797C"/>
                 </a:solidFill>
                 <a:latin typeface="DejaVu Sans"/>
               </a:rPr>
               <a:t>AGENTIC LOGIC PATHS</a:t>
+            </a:r>
+            <a:endParaRPr sz="1000" b="1" i="0">
+              <a:latin typeface="DejaVu Sans"/>
+            </a:endParaRPr>
+          </a:p>
+        </p:txBody>
+      </p:sp>
+      <p:sp>
+        <p:nvSpPr>
+          <p:cNvPr id="6" name="TextBox 5"/>
+          <p:cNvSpPr txBox="1"/>
+          <p:nvPr/>
+        </p:nvSpPr>
+        <p:spPr>
+          <a:xfrm>
+            <a:off x="11163300" y="1695450"/>
+            <a:ext cx="203200" cy="165100"/>
+          </a:xfrm>
+          <a:prstGeom prst="rect">
+            <a:avLst/>
+          </a:prstGeom>
+          <a:noFill/>
+        </p:spPr>
+        <p:txBody>
+          <a:bodyPr wrap="square" lIns="0" rIns="0" tIns="0" bIns="0">
+            <a:noAutofit/>
+          </a:bodyPr>
+          <a:lstStyle/>
+          <a:p>
+            <a:pPr algn="l"/>
+            <a:r>
+              <a:rPr sz="1100" b="1" i="0">
+                <a:solidFill>
+                  <a:srgbClr val="D7D6C4"/>
+                </a:solidFill>
+                <a:latin typeface="DejaVu Sans"/>
+              </a:rPr>
+              <a:t>10</a:t>
+            </a:r>
+            <a:endParaRPr sz="1100" b="1" i="0">
+              <a:latin typeface="DejaVu Sans"/>
+            </a:endParaRPr>
+          </a:p>
+        </p:txBody>
+      </p:sp>
+      <p:sp>
+        <p:nvSpPr>
+          <p:cNvPr id="7" name="TextBox 6"/>
+          <p:cNvSpPr txBox="1"/>
+          <p:nvPr/>
+        </p:nvSpPr>
+        <p:spPr>
+          <a:xfrm>
+            <a:off x="3829050" y="1911350"/>
+            <a:ext cx="203200" cy="171450"/>
+          </a:xfrm>
+          <a:prstGeom prst="rect">
+            <a:avLst/>
+          </a:prstGeom>
+          <a:noFill/>
+        </p:spPr>
+        <p:txBody>
+          <a:bodyPr wrap="square" lIns="0" rIns="0" tIns="0" bIns="0">
+            <a:noAutofit/>
+          </a:bodyPr>
+          <a:lstStyle/>
+          <a:p>
+            <a:pPr algn="l"/>
+            <a:r>
+              <a:rPr sz="1100" b="1" i="0">
+                <a:solidFill>
+                  <a:srgbClr val="D0D4D7"/>
+                </a:solidFill>
+                <a:latin typeface="DejaVu Sans"/>
+              </a:rPr>
+              <a:t>10</a:t>
+            </a:r>
+            <a:endParaRPr sz="1100" b="1" i="0">
+              <a:latin typeface="DejaVu Sans"/>
+            </a:endParaRPr>
+          </a:p>
+        </p:txBody>
+      </p:sp>
+      <p:sp>
+        <p:nvSpPr>
+          <p:cNvPr id="8" name="TextBox 7"/>
+          <p:cNvSpPr txBox="1"/>
+          <p:nvPr/>
+        </p:nvSpPr>
+        <p:spPr>
+          <a:xfrm>
+            <a:off x="13442950" y="1911350"/>
+            <a:ext cx="203200" cy="158750"/>
+          </a:xfrm>
+          <a:prstGeom prst="rect">
+            <a:avLst/>
+          </a:prstGeom>
+          <a:noFill/>
+        </p:spPr>
+        <p:txBody>
+          <a:bodyPr wrap="square" lIns="0" rIns="0" tIns="0" bIns="0">
+            <a:noAutofit/>
+          </a:bodyPr>
+          <a:lstStyle/>
+          <a:p>
+            <a:pPr algn="l"/>
+            <a:r>
+              <a:rPr sz="1100" b="1" i="0">
+                <a:solidFill>
+                  <a:srgbClr val="CBCED5"/>
+                </a:solidFill>
+                <a:latin typeface="DejaVu Sans"/>
+              </a:rPr>
+              <a:t>10</a:t>
+            </a:r>
+            <a:endParaRPr sz="1100" b="1" i="0">
+              <a:latin typeface="DejaVu Sans"/>
+            </a:endParaRPr>
+          </a:p>
+        </p:txBody>
+      </p:sp>
+      <p:sp>
+        <p:nvSpPr>
+          <p:cNvPr id="9" name="TextBox 8"/>
+          <p:cNvSpPr txBox="1"/>
+          <p:nvPr/>
+        </p:nvSpPr>
+        <p:spPr>
+          <a:xfrm>
+            <a:off x="11633200" y="2082800"/>
+            <a:ext cx="228600" cy="158750"/>
+          </a:xfrm>
+          <a:prstGeom prst="rect">
+            <a:avLst/>
+          </a:prstGeom>
+          <a:noFill/>
+        </p:spPr>
+        <p:txBody>
+          <a:bodyPr wrap="square" lIns="0" rIns="0" tIns="0" bIns="0">
+            <a:noAutofit/>
+          </a:bodyPr>
+          <a:lstStyle/>
+          <a:p>
+            <a:pPr algn="l"/>
+            <a:r>
+              <a:rPr sz="1300" b="1" i="0">
+                <a:solidFill>
+                  <a:srgbClr val="CFCDBC"/>
+                </a:solidFill>
+                <a:latin typeface="DejaVu Sans"/>
+              </a:rPr>
+              <a:t>KA</a:t>
+            </a:r>
+            <a:endParaRPr sz="1300" b="1" i="0">
+              <a:latin typeface="DejaVu Sans"/>
+            </a:endParaRPr>
+          </a:p>
+        </p:txBody>
+      </p:sp>
+      <p:sp>
+        <p:nvSpPr>
+          <p:cNvPr id="10" name="TextBox 9"/>
+          <p:cNvSpPr txBox="1"/>
+          <p:nvPr/>
+        </p:nvSpPr>
+        <p:spPr>
+          <a:xfrm>
+            <a:off x="10217150" y="2101850"/>
+            <a:ext cx="266700" cy="209550"/>
+          </a:xfrm>
+          <a:prstGeom prst="rect">
+            <a:avLst/>
+          </a:prstGeom>
+          <a:noFill/>
+        </p:spPr>
+        <p:txBody>
+          <a:bodyPr wrap="square" lIns="0" rIns="0" tIns="0" bIns="0">
+            <a:noAutofit/>
+          </a:bodyPr>
+          <a:lstStyle/>
+          <a:p>
+            <a:pPr algn="l"/>
+            <a:r>
+              <a:rPr sz="1300" b="1" i="0">
+                <a:solidFill>
+                  <a:srgbClr val="D4D6BF"/>
+                </a:solidFill>
+                <a:latin typeface="DejaVu Sans"/>
+              </a:rPr>
+              <a:t>NG</a:t>
+            </a:r>
+            <a:endParaRPr sz="1300" b="1" i="0">
+              <a:latin typeface="DejaVu Sans"/>
+            </a:endParaRPr>
+          </a:p>
+        </p:txBody>
+      </p:sp>
+      <p:sp>
+        <p:nvSpPr>
+          <p:cNvPr id="11" name="TextBox 10"/>
+          <p:cNvSpPr txBox="1"/>
+          <p:nvPr/>
+        </p:nvSpPr>
+        <p:spPr>
+          <a:xfrm>
+            <a:off x="2171700" y="2451100"/>
+            <a:ext cx="1441450" cy="190500"/>
+          </a:xfrm>
+          <a:prstGeom prst="rect">
+            <a:avLst/>
+          </a:prstGeom>
+          <a:noFill/>
+        </p:spPr>
+        <p:txBody>
+          <a:bodyPr wrap="square" lIns="0" rIns="0" tIns="0" bIns="0">
+            <a:noAutofit/>
+          </a:bodyPr>
+          <a:lstStyle/>
+          <a:p>
+            <a:pPr algn="l"/>
+            <a:r>
+              <a:rPr sz="900" b="1" i="0">
+                <a:solidFill>
+                  <a:srgbClr val="7B7E80"/>
+                </a:solidFill>
+                <a:latin typeface="DejaVu Sans"/>
+              </a:rPr>
+              <a:t>VECTOR EMBEDDINGS</a:t>
+            </a:r>
+            <a:endParaRPr sz="900" b="1" i="0">
+              <a:latin typeface="DejaVu Sans"/>
+            </a:endParaRPr>
+          </a:p>
+        </p:txBody>
+      </p:sp>
+      <p:sp>
+        <p:nvSpPr>
+          <p:cNvPr id="12" name="TextBox 11"/>
+          <p:cNvSpPr txBox="1"/>
+          <p:nvPr/>
+        </p:nvSpPr>
+        <p:spPr>
+          <a:xfrm>
+            <a:off x="13735050" y="2590800"/>
+            <a:ext cx="1524000" cy="190500"/>
+          </a:xfrm>
+          <a:prstGeom prst="rect">
+            <a:avLst/>
+          </a:prstGeom>
+          <a:noFill/>
+        </p:spPr>
+        <p:txBody>
+          <a:bodyPr wrap="square" lIns="0" rIns="0" tIns="0" bIns="0">
+            <a:noAutofit/>
+          </a:bodyPr>
+          <a:lstStyle/>
+          <a:p>
+            <a:pPr algn="l"/>
+            <a:r>
+              <a:rPr sz="900" b="1" i="0">
+                <a:solidFill>
+                  <a:srgbClr val="7C8084"/>
+                </a:solidFill>
+                <a:latin typeface="DejaVu Sans"/>
+              </a:rPr>
+              <a:t>CONTEXTUAL ROUTING</a:t>
+            </a:r>
+            <a:endParaRPr sz="900" b="1" i="0">
+              <a:latin typeface="DejaVu Sans"/>
+            </a:endParaRPr>
+          </a:p>
+        </p:txBody>
+      </p:sp>
+      <p:sp>
+        <p:nvSpPr>
+          <p:cNvPr id="13" name="TextBox 12"/>
+          <p:cNvSpPr txBox="1"/>
+          <p:nvPr/>
+        </p:nvSpPr>
+        <p:spPr>
+          <a:xfrm>
+            <a:off x="10248900" y="2762250"/>
+            <a:ext cx="203200" cy="158750"/>
+          </a:xfrm>
+          <a:prstGeom prst="rect">
+            <a:avLst/>
+          </a:prstGeom>
+          <a:noFill/>
+        </p:spPr>
+        <p:txBody>
+          <a:bodyPr wrap="square" lIns="0" rIns="0" tIns="0" bIns="0">
+            <a:noAutofit/>
+          </a:bodyPr>
+          <a:lstStyle/>
+          <a:p>
+            <a:pPr algn="l"/>
+            <a:r>
+              <a:rPr sz="1000" b="0" i="0">
+                <a:solidFill>
+                  <a:srgbClr val="D3D6C3"/>
+                </a:solidFill>
+                <a:latin typeface="DejaVu Sans"/>
+              </a:rPr>
+              <a:t>NG</a:t>
             </a:r>
             <a:endParaRPr sz="1000" b="0" i="0">
               <a:latin typeface="DejaVu Sans"/>
@@ -3230,37 +3534,37 @@
       </p:sp>
       <p:sp>
         <p:nvSpPr>
-          <p:cNvPr id="6" name="TextBox 5"/>
-          <p:cNvSpPr txBox="1"/>
-          <p:nvPr/>
-        </p:nvSpPr>
-        <p:spPr>
-          <a:xfrm>
-            <a:off x="11163300" y="1695450"/>
-            <a:ext cx="203200" cy="165100"/>
-          </a:xfrm>
-          <a:prstGeom prst="rect">
-            <a:avLst/>
-          </a:prstGeom>
-          <a:noFill/>
-        </p:spPr>
-        <p:txBody>
-          <a:bodyPr wrap="square" lIns="0" rIns="0" tIns="0" bIns="0">
-            <a:noAutofit/>
-          </a:bodyPr>
-          <a:lstStyle/>
-          <a:p>
-            <a:pPr algn="l"/>
-            <a:r>
-              <a:rPr sz="1200" b="0" i="0">
-                <a:solidFill>
-                  <a:srgbClr val="D7D6C4"/>
+          <p:cNvPr id="14" name="TextBox 13"/>
+          <p:cNvSpPr txBox="1"/>
+          <p:nvPr/>
+        </p:nvSpPr>
+        <p:spPr>
+          <a:xfrm>
+            <a:off x="13735050" y="2857500"/>
+            <a:ext cx="1606550" cy="190500"/>
+          </a:xfrm>
+          <a:prstGeom prst="rect">
+            <a:avLst/>
+          </a:prstGeom>
+          <a:noFill/>
+        </p:spPr>
+        <p:txBody>
+          <a:bodyPr wrap="square" lIns="0" rIns="0" tIns="0" bIns="0">
+            <a:noAutofit/>
+          </a:bodyPr>
+          <a:lstStyle/>
+          <a:p>
+            <a:pPr algn="l"/>
+            <a:r>
+              <a:rPr sz="1000" b="1" i="0">
+                <a:solidFill>
+                  <a:srgbClr val="74787D"/>
                 </a:solidFill>
                 <a:latin typeface="DejaVu Sans"/>
               </a:rPr>
-              <a:t>10</a:t>
-            </a:r>
-            <a:endParaRPr sz="1100" b="0" i="0">
+              <a:t>PRECISION INFERENCE</a:t>
+            </a:r>
+            <a:endParaRPr sz="1000" b="1" i="0">
               <a:latin typeface="DejaVu Sans"/>
             </a:endParaRPr>
           </a:p>
@@ -3268,37 +3572,37 @@
       </p:sp>
       <p:sp>
         <p:nvSpPr>
-          <p:cNvPr id="7" name="TextBox 6"/>
-          <p:cNvSpPr txBox="1"/>
-          <p:nvPr/>
-        </p:nvSpPr>
-        <p:spPr>
-          <a:xfrm>
-            <a:off x="3829050" y="1911350"/>
-            <a:ext cx="203200" cy="171450"/>
-          </a:xfrm>
-          <a:prstGeom prst="rect">
-            <a:avLst/>
-          </a:prstGeom>
-          <a:noFill/>
-        </p:spPr>
-        <p:txBody>
-          <a:bodyPr wrap="square" lIns="0" rIns="0" tIns="0" bIns="0">
-            <a:noAutofit/>
-          </a:bodyPr>
-          <a:lstStyle/>
-          <a:p>
-            <a:pPr algn="l"/>
-            <a:r>
-              <a:rPr sz="1200" b="0" i="0">
-                <a:solidFill>
-                  <a:srgbClr val="D0D4D7"/>
+          <p:cNvPr id="15" name="TextBox 14"/>
+          <p:cNvSpPr txBox="1"/>
+          <p:nvPr/>
+        </p:nvSpPr>
+        <p:spPr>
+          <a:xfrm>
+            <a:off x="3886200" y="3035300"/>
+            <a:ext cx="139700" cy="158750"/>
+          </a:xfrm>
+          <a:prstGeom prst="rect">
+            <a:avLst/>
+          </a:prstGeom>
+          <a:noFill/>
+        </p:spPr>
+        <p:txBody>
+          <a:bodyPr wrap="square" lIns="0" rIns="0" tIns="0" bIns="0">
+            <a:noAutofit/>
+          </a:bodyPr>
+          <a:lstStyle/>
+          <a:p>
+            <a:pPr algn="l"/>
+            <a:r>
+              <a:rPr sz="1300" b="1" i="0">
+                <a:solidFill>
+                  <a:srgbClr val="D6D5DA"/>
                 </a:solidFill>
                 <a:latin typeface="DejaVu Sans"/>
               </a:rPr>
-              <a:t>10</a:t>
-            </a:r>
-            <a:endParaRPr sz="1100" b="0" i="0">
+              <a:t>2</a:t>
+            </a:r>
+            <a:endParaRPr sz="1300" b="1" i="0">
               <a:latin typeface="DejaVu Sans"/>
             </a:endParaRPr>
           </a:p>
@@ -3306,37 +3610,37 @@
       </p:sp>
       <p:sp>
         <p:nvSpPr>
-          <p:cNvPr id="8" name="TextBox 7"/>
-          <p:cNvSpPr txBox="1"/>
-          <p:nvPr/>
-        </p:nvSpPr>
-        <p:spPr>
-          <a:xfrm>
-            <a:off x="13442950" y="1911350"/>
-            <a:ext cx="203200" cy="158750"/>
-          </a:xfrm>
-          <a:prstGeom prst="rect">
-            <a:avLst/>
-          </a:prstGeom>
-          <a:noFill/>
-        </p:spPr>
-        <p:txBody>
-          <a:bodyPr wrap="square" lIns="0" rIns="0" tIns="0" bIns="0">
-            <a:noAutofit/>
-          </a:bodyPr>
-          <a:lstStyle/>
-          <a:p>
-            <a:pPr algn="l"/>
-            <a:r>
-              <a:rPr sz="1200" b="0" i="0">
-                <a:solidFill>
-                  <a:srgbClr val="CBCED5"/>
+          <p:cNvPr id="16" name="TextBox 15"/>
+          <p:cNvSpPr txBox="1"/>
+          <p:nvPr/>
+        </p:nvSpPr>
+        <p:spPr>
+          <a:xfrm>
+            <a:off x="13703300" y="3695700"/>
+            <a:ext cx="1555750" cy="190500"/>
+          </a:xfrm>
+          <a:prstGeom prst="rect">
+            <a:avLst/>
+          </a:prstGeom>
+          <a:noFill/>
+        </p:spPr>
+        <p:txBody>
+          <a:bodyPr wrap="square" lIns="0" rIns="0" tIns="0" bIns="0">
+            <a:noAutofit/>
+          </a:bodyPr>
+          <a:lstStyle/>
+          <a:p>
+            <a:pPr algn="l"/>
+            <a:r>
+              <a:rPr sz="1000" b="1" i="0">
+                <a:solidFill>
+                  <a:srgbClr val="777C81"/>
                 </a:solidFill>
                 <a:latin typeface="DejaVu Sans"/>
               </a:rPr>
-              <a:t>10</a:t>
-            </a:r>
-            <a:endParaRPr sz="1100" b="0" i="0">
+              <a:t>TARGET NODE LOCKED</a:t>
+            </a:r>
+            <a:endParaRPr sz="1000" b="1" i="0">
               <a:latin typeface="DejaVu Sans"/>
             </a:endParaRPr>
           </a:p>
@@ -3344,37 +3648,37 @@
       </p:sp>
       <p:sp>
         <p:nvSpPr>
-          <p:cNvPr id="9" name="TextBox 8"/>
-          <p:cNvSpPr txBox="1"/>
-          <p:nvPr/>
-        </p:nvSpPr>
-        <p:spPr>
-          <a:xfrm>
-            <a:off x="11633200" y="2082800"/>
-            <a:ext cx="228600" cy="158750"/>
-          </a:xfrm>
-          <a:prstGeom prst="rect">
-            <a:avLst/>
-          </a:prstGeom>
-          <a:noFill/>
-        </p:spPr>
-        <p:txBody>
-          <a:bodyPr wrap="square" lIns="0" rIns="0" tIns="0" bIns="0">
-            <a:noAutofit/>
-          </a:bodyPr>
-          <a:lstStyle/>
-          <a:p>
-            <a:pPr algn="l"/>
-            <a:r>
-              <a:rPr sz="1350" b="0" i="0">
-                <a:solidFill>
-                  <a:srgbClr val="CFCDBC"/>
+          <p:cNvPr id="17" name="TextBox 16"/>
+          <p:cNvSpPr txBox="1"/>
+          <p:nvPr/>
+        </p:nvSpPr>
+        <p:spPr>
+          <a:xfrm>
+            <a:off x="2178050" y="3702050"/>
+            <a:ext cx="1435100" cy="171450"/>
+          </a:xfrm>
+          <a:prstGeom prst="rect">
+            <a:avLst/>
+          </a:prstGeom>
+          <a:noFill/>
+        </p:spPr>
+        <p:txBody>
+          <a:bodyPr wrap="square" lIns="0" rIns="0" tIns="0" bIns="0">
+            <a:noAutofit/>
+          </a:bodyPr>
+          <a:lstStyle/>
+          <a:p>
+            <a:pPr algn="l"/>
+            <a:r>
+              <a:rPr sz="1000" b="1" i="0">
+                <a:solidFill>
+                  <a:srgbClr val="7D8184"/>
                 </a:solidFill>
                 <a:latin typeface="DejaVu Sans"/>
               </a:rPr>
-              <a:t>KA</a:t>
-            </a:r>
-            <a:endParaRPr sz="1300" b="0" i="0">
+              <a:t>SENANTIC CLUSTERS</a:t>
+            </a:r>
+            <a:endParaRPr sz="1000" b="1" i="0">
               <a:latin typeface="DejaVu Sans"/>
             </a:endParaRPr>
           </a:p>
@@ -3382,37 +3686,37 @@
       </p:sp>
       <p:sp>
         <p:nvSpPr>
-          <p:cNvPr id="10" name="TextBox 9"/>
-          <p:cNvSpPr txBox="1"/>
-          <p:nvPr/>
-        </p:nvSpPr>
-        <p:spPr>
-          <a:xfrm>
-            <a:off x="10217150" y="2101850"/>
-            <a:ext cx="266700" cy="209550"/>
-          </a:xfrm>
-          <a:prstGeom prst="rect">
-            <a:avLst/>
-          </a:prstGeom>
-          <a:noFill/>
-        </p:spPr>
-        <p:txBody>
-          <a:bodyPr wrap="square" lIns="0" rIns="0" tIns="0" bIns="0">
-            <a:noAutofit/>
-          </a:bodyPr>
-          <a:lstStyle/>
-          <a:p>
-            <a:pPr algn="l"/>
-            <a:r>
-              <a:rPr sz="1350" b="0" i="0">
-                <a:solidFill>
-                  <a:srgbClr val="D4D6BF"/>
+          <p:cNvPr id="18" name="TextBox 17"/>
+          <p:cNvSpPr txBox="1"/>
+          <p:nvPr/>
+        </p:nvSpPr>
+        <p:spPr>
+          <a:xfrm>
+            <a:off x="3860800" y="3714750"/>
+            <a:ext cx="196850" cy="158750"/>
+          </a:xfrm>
+          <a:prstGeom prst="rect">
+            <a:avLst/>
+          </a:prstGeom>
+          <a:noFill/>
+        </p:spPr>
+        <p:txBody>
+          <a:bodyPr wrap="square" lIns="0" rIns="0" tIns="0" bIns="0">
+            <a:noAutofit/>
+          </a:bodyPr>
+          <a:lstStyle/>
+          <a:p>
+            <a:pPr algn="l"/>
+            <a:r>
+              <a:rPr sz="1300" b="1" i="0">
+                <a:solidFill>
+                  <a:srgbClr val="C9CDD0"/>
                 </a:solidFill>
                 <a:latin typeface="DejaVu Sans"/>
               </a:rPr>
-              <a:t>NG</a:t>
-            </a:r>
-            <a:endParaRPr sz="1300" b="0" i="0">
+              <a:t>0</a:t>
+            </a:r>
+            <a:endParaRPr sz="1300" b="1" i="0">
               <a:latin typeface="DejaVu Sans"/>
             </a:endParaRPr>
           </a:p>
@@ -3420,13 +3724,165 @@
       </p:sp>
       <p:sp>
         <p:nvSpPr>
-          <p:cNvPr id="11" name="TextBox 10"/>
-          <p:cNvSpPr txBox="1"/>
-          <p:nvPr/>
-        </p:nvSpPr>
-        <p:spPr>
-          <a:xfrm>
-            <a:off x="2171700" y="2451100"/>
+          <p:cNvPr id="19" name="TextBox 18"/>
+          <p:cNvSpPr txBox="1"/>
+          <p:nvPr/>
+        </p:nvSpPr>
+        <p:spPr>
+          <a:xfrm>
+            <a:off x="13442950" y="3727450"/>
+            <a:ext cx="177800" cy="133350"/>
+          </a:xfrm>
+          <a:prstGeom prst="rect">
+            <a:avLst/>
+          </a:prstGeom>
+          <a:noFill/>
+        </p:spPr>
+        <p:txBody>
+          <a:bodyPr wrap="square" lIns="0" rIns="0" tIns="0" bIns="0">
+            <a:noAutofit/>
+          </a:bodyPr>
+          <a:lstStyle/>
+          <a:p>
+            <a:pPr algn="l"/>
+            <a:r>
+              <a:rPr sz="1100" b="1" i="0">
+                <a:solidFill>
+                  <a:srgbClr val="C6CBD1"/>
+                </a:solidFill>
+                <a:latin typeface="DejaVu Sans"/>
+              </a:rPr>
+              <a:t>0</a:t>
+            </a:r>
+            <a:endParaRPr sz="1100" b="1" i="0">
+              <a:latin typeface="DejaVu Sans"/>
+            </a:endParaRPr>
+          </a:p>
+        </p:txBody>
+      </p:sp>
+      <p:sp>
+        <p:nvSpPr>
+          <p:cNvPr id="20" name="TextBox 19"/>
+          <p:cNvSpPr txBox="1"/>
+          <p:nvPr/>
+        </p:nvSpPr>
+        <p:spPr>
+          <a:xfrm>
+            <a:off x="3879850" y="4362450"/>
+            <a:ext cx="127000" cy="114300"/>
+          </a:xfrm>
+          <a:prstGeom prst="rect">
+            <a:avLst/>
+          </a:prstGeom>
+          <a:noFill/>
+        </p:spPr>
+        <p:txBody>
+          <a:bodyPr wrap="square" lIns="0" rIns="0" tIns="0" bIns="0">
+            <a:noAutofit/>
+          </a:bodyPr>
+          <a:lstStyle/>
+          <a:p>
+            <a:pPr algn="l"/>
+            <a:r>
+              <a:rPr sz="800" b="1" i="0">
+                <a:solidFill>
+                  <a:srgbClr val="D4D8DB"/>
+                </a:solidFill>
+                <a:latin typeface="Noto Sans CJK TC"/>
+              </a:rPr>
+              <a:t>-2</a:t>
+            </a:r>
+            <a:endParaRPr sz="800" b="1" i="0">
+              <a:latin typeface="Noto Sans CJK TC"/>
+            </a:endParaRPr>
+          </a:p>
+        </p:txBody>
+      </p:sp>
+      <p:sp>
+        <p:nvSpPr>
+          <p:cNvPr id="21" name="TextBox 20"/>
+          <p:cNvSpPr txBox="1"/>
+          <p:nvPr/>
+        </p:nvSpPr>
+        <p:spPr>
+          <a:xfrm>
+            <a:off x="11645900" y="4457700"/>
+            <a:ext cx="190500" cy="152400"/>
+          </a:xfrm>
+          <a:prstGeom prst="rect">
+            <a:avLst/>
+          </a:prstGeom>
+          <a:noFill/>
+        </p:spPr>
+        <p:txBody>
+          <a:bodyPr wrap="square" lIns="0" rIns="0" tIns="0" bIns="0">
+            <a:noAutofit/>
+          </a:bodyPr>
+          <a:lstStyle/>
+          <a:p>
+            <a:pPr algn="l"/>
+            <a:r>
+              <a:rPr sz="1000" b="1" i="0">
+                <a:solidFill>
+                  <a:srgbClr val="D0CEBD"/>
+                </a:solidFill>
+                <a:latin typeface="DejaVu Sans"/>
+              </a:rPr>
+              <a:t>AC</a:t>
+            </a:r>
+            <a:endParaRPr sz="1000" b="1" i="0">
+              <a:latin typeface="DejaVu Sans"/>
+            </a:endParaRPr>
+          </a:p>
+        </p:txBody>
+      </p:sp>
+      <p:sp>
+        <p:nvSpPr>
+          <p:cNvPr id="22" name="TextBox 21"/>
+          <p:cNvSpPr txBox="1"/>
+          <p:nvPr/>
+        </p:nvSpPr>
+        <p:spPr>
+          <a:xfrm>
+            <a:off x="13735050" y="4730750"/>
+            <a:ext cx="1524000" cy="190500"/>
+          </a:xfrm>
+          <a:prstGeom prst="rect">
+            <a:avLst/>
+          </a:prstGeom>
+          <a:noFill/>
+        </p:spPr>
+        <p:txBody>
+          <a:bodyPr wrap="square" lIns="0" rIns="0" tIns="0" bIns="0">
+            <a:noAutofit/>
+          </a:bodyPr>
+          <a:lstStyle/>
+          <a:p>
+            <a:pPr algn="l"/>
+            <a:r>
+              <a:rPr sz="900" b="1" i="0">
+                <a:solidFill>
+                  <a:srgbClr val="73787E"/>
+                </a:solidFill>
+                <a:latin typeface="DejaVu Sans"/>
+              </a:rPr>
+              <a:t>TARGET NODE LOCKED</a:t>
+            </a:r>
+            <a:endParaRPr sz="900" b="1" i="0">
+              <a:latin typeface="DejaVu Sans"/>
+            </a:endParaRPr>
+          </a:p>
+        </p:txBody>
+      </p:sp>
+      <p:sp>
+        <p:nvSpPr>
+          <p:cNvPr id="23" name="TextBox 22"/>
+          <p:cNvSpPr txBox="1"/>
+          <p:nvPr/>
+        </p:nvSpPr>
+        <p:spPr>
+          <a:xfrm>
+            <a:off x="2171700" y="4768850"/>
             <a:ext cx="1441450" cy="190500"/>
           </a:xfrm>
           <a:prstGeom prst="rect">
@@ -3442,13 +3898,241 @@
           <a:p>
             <a:pPr algn="l"/>
             <a:r>
-              <a:rPr sz="1000" b="0" i="0">
-                <a:solidFill>
-                  <a:srgbClr val="7B7E80"/>
+              <a:rPr sz="900" b="1" i="0">
+                <a:solidFill>
+                  <a:srgbClr val="76797C"/>
                 </a:solidFill>
                 <a:latin typeface="DejaVu Sans"/>
               </a:rPr>
               <a:t>VECTOR EMBEDDINGS</a:t>
+            </a:r>
+            <a:endParaRPr sz="900" b="1" i="0">
+              <a:latin typeface="DejaVu Sans"/>
+            </a:endParaRPr>
+          </a:p>
+        </p:txBody>
+      </p:sp>
+      <p:sp>
+        <p:nvSpPr>
+          <p:cNvPr id="24" name="TextBox 23"/>
+          <p:cNvSpPr txBox="1"/>
+          <p:nvPr/>
+        </p:nvSpPr>
+        <p:spPr>
+          <a:xfrm>
+            <a:off x="11664950" y="5086350"/>
+            <a:ext cx="165100" cy="139700"/>
+          </a:xfrm>
+          <a:prstGeom prst="rect">
+            <a:avLst/>
+          </a:prstGeom>
+          <a:noFill/>
+        </p:spPr>
+        <p:txBody>
+          <a:bodyPr wrap="square" lIns="0" rIns="0" tIns="0" bIns="0">
+            <a:noAutofit/>
+          </a:bodyPr>
+          <a:lstStyle/>
+          <a:p>
+            <a:pPr algn="l"/>
+            <a:r>
+              <a:rPr sz="1100" b="1" i="0">
+                <a:solidFill>
+                  <a:srgbClr val="D2D2BE"/>
+                </a:solidFill>
+                <a:latin typeface="DejaVu Sans"/>
+              </a:rPr>
+              <a:t>M</a:t>
+            </a:r>
+            <a:endParaRPr sz="1100" b="1" i="0">
+              <a:latin typeface="DejaVu Sans"/>
+            </a:endParaRPr>
+          </a:p>
+        </p:txBody>
+      </p:sp>
+      <p:sp>
+        <p:nvSpPr>
+          <p:cNvPr id="25" name="TextBox 24"/>
+          <p:cNvSpPr txBox="1"/>
+          <p:nvPr/>
+        </p:nvSpPr>
+        <p:spPr>
+          <a:xfrm>
+            <a:off x="2819400" y="5130800"/>
+            <a:ext cx="806450" cy="196850"/>
+          </a:xfrm>
+          <a:prstGeom prst="rect">
+            <a:avLst/>
+          </a:prstGeom>
+          <a:noFill/>
+        </p:spPr>
+        <p:txBody>
+          <a:bodyPr wrap="square" lIns="0" rIns="0" tIns="0" bIns="0">
+            <a:noAutofit/>
+          </a:bodyPr>
+          <a:lstStyle/>
+          <a:p>
+            <a:pPr algn="l"/>
+            <a:r>
+              <a:rPr sz="1200" b="1" i="0">
+                <a:solidFill>
+                  <a:srgbClr val="828689"/>
+                </a:solidFill>
+                <a:latin typeface="DejaVu Sans"/>
+              </a:rPr>
+              <a:t>Fira Code</a:t>
+            </a:r>
+            <a:endParaRPr sz="1200" b="1" i="0">
+              <a:latin typeface="DejaVu Sans"/>
+            </a:endParaRPr>
+          </a:p>
+        </p:txBody>
+      </p:sp>
+      <p:sp>
+        <p:nvSpPr>
+          <p:cNvPr id="26" name="TextBox 25"/>
+          <p:cNvSpPr txBox="1"/>
+          <p:nvPr/>
+        </p:nvSpPr>
+        <p:spPr>
+          <a:xfrm>
+            <a:off x="10236200" y="5270500"/>
+            <a:ext cx="234950" cy="146050"/>
+          </a:xfrm>
+          <a:prstGeom prst="rect">
+            <a:avLst/>
+          </a:prstGeom>
+          <a:noFill/>
+        </p:spPr>
+        <p:txBody>
+          <a:bodyPr wrap="square" lIns="0" rIns="0" tIns="0" bIns="0">
+            <a:noAutofit/>
+          </a:bodyPr>
+          <a:lstStyle/>
+          <a:p>
+            <a:pPr algn="l"/>
+            <a:r>
+              <a:rPr sz="1100" b="1" i="0">
+                <a:solidFill>
+                  <a:srgbClr val="D1D1C0"/>
+                </a:solidFill>
+                <a:latin typeface="DejaVu Sans"/>
+              </a:rPr>
+              <a:t>RA</a:t>
+            </a:r>
+            <a:endParaRPr sz="1100" b="1" i="0">
+              <a:latin typeface="DejaVu Sans"/>
+            </a:endParaRPr>
+          </a:p>
+        </p:txBody>
+      </p:sp>
+      <p:sp>
+        <p:nvSpPr>
+          <p:cNvPr id="27" name="TextBox 26"/>
+          <p:cNvSpPr txBox="1"/>
+          <p:nvPr/>
+        </p:nvSpPr>
+        <p:spPr>
+          <a:xfrm>
+            <a:off x="13468350" y="5340350"/>
+            <a:ext cx="273050" cy="171450"/>
+          </a:xfrm>
+          <a:prstGeom prst="rect">
+            <a:avLst/>
+          </a:prstGeom>
+          <a:noFill/>
+        </p:spPr>
+        <p:txBody>
+          <a:bodyPr wrap="square" lIns="0" rIns="0" tIns="0" bIns="0">
+            <a:noAutofit/>
+          </a:bodyPr>
+          <a:lstStyle/>
+          <a:p>
+            <a:pPr algn="l"/>
+            <a:r>
+              <a:rPr sz="1300" b="1" i="0">
+                <a:solidFill>
+                  <a:srgbClr val="CACED4"/>
+                </a:solidFill>
+                <a:latin typeface="Noto Sans CJK TC"/>
+              </a:rPr>
+              <a:t>-10</a:t>
+            </a:r>
+            <a:endParaRPr sz="1300" b="1" i="0">
+              <a:latin typeface="Noto Sans CJK TC"/>
+            </a:endParaRPr>
+          </a:p>
+        </p:txBody>
+      </p:sp>
+      <p:sp>
+        <p:nvSpPr>
+          <p:cNvPr id="28" name="TextBox 27"/>
+          <p:cNvSpPr txBox="1"/>
+          <p:nvPr/>
+        </p:nvSpPr>
+        <p:spPr>
+          <a:xfrm>
+            <a:off x="11645900" y="5638800"/>
+            <a:ext cx="190500" cy="158750"/>
+          </a:xfrm>
+          <a:prstGeom prst="rect">
+            <a:avLst/>
+          </a:prstGeom>
+          <a:noFill/>
+        </p:spPr>
+        <p:txBody>
+          <a:bodyPr wrap="square" lIns="0" rIns="0" tIns="0" bIns="0">
+            <a:noAutofit/>
+          </a:bodyPr>
+          <a:lstStyle/>
+          <a:p>
+            <a:pPr algn="l"/>
+            <a:r>
+              <a:rPr sz="900" b="1" i="0">
+                <a:solidFill>
+                  <a:srgbClr val="CDC7B5"/>
+                </a:solidFill>
+                <a:latin typeface="DejaVu Sans"/>
+              </a:rPr>
+              <a:t>RO</a:t>
+            </a:r>
+            <a:endParaRPr sz="900" b="1" i="0">
+              <a:latin typeface="DejaVu Sans"/>
+            </a:endParaRPr>
+          </a:p>
+        </p:txBody>
+      </p:sp>
+      <p:sp>
+        <p:nvSpPr>
+          <p:cNvPr id="29" name="TextBox 28"/>
+          <p:cNvSpPr txBox="1"/>
+          <p:nvPr/>
+        </p:nvSpPr>
+        <p:spPr>
+          <a:xfrm>
+            <a:off x="9302750" y="5829300"/>
+            <a:ext cx="1536700" cy="190500"/>
+          </a:xfrm>
+          <a:prstGeom prst="rect">
+            <a:avLst/>
+          </a:prstGeom>
+          <a:noFill/>
+        </p:spPr>
+        <p:txBody>
+          <a:bodyPr wrap="square" lIns="0" rIns="0" tIns="0" bIns="0">
+            <a:noAutofit/>
+          </a:bodyPr>
+          <a:lstStyle/>
+          <a:p>
+            <a:pPr algn="l"/>
+            <a:r>
+              <a:rPr sz="900" b="0" i="0">
+                <a:solidFill>
+                  <a:srgbClr val="73767B"/>
+                </a:solidFill>
+                <a:latin typeface="DejaVu Sans"/>
+              </a:rPr>
+              <a:t>CONTEXTUAL ROUTING</a:t>
             </a:r>
             <a:endParaRPr sz="900" b="0" i="0">
               <a:latin typeface="DejaVu Sans"/>
@@ -3458,690 +4142,6 @@
       </p:sp>
       <p:sp>
         <p:nvSpPr>
-          <p:cNvPr id="12" name="TextBox 11"/>
-          <p:cNvSpPr txBox="1"/>
-          <p:nvPr/>
-        </p:nvSpPr>
-        <p:spPr>
-          <a:xfrm>
-            <a:off x="13735050" y="2590800"/>
-            <a:ext cx="1524000" cy="190500"/>
-          </a:xfrm>
-          <a:prstGeom prst="rect">
-            <a:avLst/>
-          </a:prstGeom>
-          <a:noFill/>
-        </p:spPr>
-        <p:txBody>
-          <a:bodyPr wrap="square" lIns="0" rIns="0" tIns="0" bIns="0">
-            <a:noAutofit/>
-          </a:bodyPr>
-          <a:lstStyle/>
-          <a:p>
-            <a:pPr algn="l"/>
-            <a:r>
-              <a:rPr sz="1000" b="0" i="0">
-                <a:solidFill>
-                  <a:srgbClr val="7C8084"/>
-                </a:solidFill>
-                <a:latin typeface="DejaVu Sans"/>
-              </a:rPr>
-              <a:t>CONTEXTUAL ROUTING</a:t>
-            </a:r>
-            <a:endParaRPr sz="900" b="0" i="0">
-              <a:latin typeface="DejaVu Sans"/>
-            </a:endParaRPr>
-          </a:p>
-        </p:txBody>
-      </p:sp>
-      <p:sp>
-        <p:nvSpPr>
-          <p:cNvPr id="13" name="TextBox 12"/>
-          <p:cNvSpPr txBox="1"/>
-          <p:nvPr/>
-        </p:nvSpPr>
-        <p:spPr>
-          <a:xfrm>
-            <a:off x="10248900" y="2762250"/>
-            <a:ext cx="203200" cy="158750"/>
-          </a:xfrm>
-          <a:prstGeom prst="rect">
-            <a:avLst/>
-          </a:prstGeom>
-          <a:noFill/>
-        </p:spPr>
-        <p:txBody>
-          <a:bodyPr wrap="square" lIns="0" rIns="0" tIns="0" bIns="0">
-            <a:noAutofit/>
-          </a:bodyPr>
-          <a:lstStyle/>
-          <a:p>
-            <a:pPr algn="l"/>
-            <a:r>
-              <a:rPr sz="1000" b="0" i="0">
-                <a:solidFill>
-                  <a:srgbClr val="D3D6C3"/>
-                </a:solidFill>
-                <a:latin typeface="DejaVu Sans"/>
-              </a:rPr>
-              <a:t>NG</a:t>
-            </a:r>
-            <a:endParaRPr sz="1000" b="0" i="0">
-              <a:latin typeface="DejaVu Sans"/>
-            </a:endParaRPr>
-          </a:p>
-        </p:txBody>
-      </p:sp>
-      <p:sp>
-        <p:nvSpPr>
-          <p:cNvPr id="14" name="TextBox 13"/>
-          <p:cNvSpPr txBox="1"/>
-          <p:nvPr/>
-        </p:nvSpPr>
-        <p:spPr>
-          <a:xfrm>
-            <a:off x="13735050" y="2857500"/>
-            <a:ext cx="1606550" cy="190500"/>
-          </a:xfrm>
-          <a:prstGeom prst="rect">
-            <a:avLst/>
-          </a:prstGeom>
-          <a:noFill/>
-        </p:spPr>
-        <p:txBody>
-          <a:bodyPr wrap="square" lIns="0" rIns="0" tIns="0" bIns="0">
-            <a:noAutofit/>
-          </a:bodyPr>
-          <a:lstStyle/>
-          <a:p>
-            <a:pPr algn="l"/>
-            <a:r>
-              <a:rPr sz="1100" b="0" i="0">
-                <a:solidFill>
-                  <a:srgbClr val="74797E"/>
-                </a:solidFill>
-                <a:latin typeface="DejaVu Sans"/>
-              </a:rPr>
-              <a:t>PRECISION INFERENCE</a:t>
-            </a:r>
-            <a:endParaRPr sz="1000" b="0" i="0">
-              <a:latin typeface="DejaVu Sans"/>
-            </a:endParaRPr>
-          </a:p>
-        </p:txBody>
-      </p:sp>
-      <p:sp>
-        <p:nvSpPr>
-          <p:cNvPr id="15" name="TextBox 14"/>
-          <p:cNvSpPr txBox="1"/>
-          <p:nvPr/>
-        </p:nvSpPr>
-        <p:spPr>
-          <a:xfrm>
-            <a:off x="3886200" y="3035300"/>
-            <a:ext cx="139700" cy="158750"/>
-          </a:xfrm>
-          <a:prstGeom prst="rect">
-            <a:avLst/>
-          </a:prstGeom>
-          <a:noFill/>
-        </p:spPr>
-        <p:txBody>
-          <a:bodyPr wrap="square" lIns="0" rIns="0" tIns="0" bIns="0">
-            <a:noAutofit/>
-          </a:bodyPr>
-          <a:lstStyle/>
-          <a:p>
-            <a:pPr algn="l"/>
-            <a:r>
-              <a:rPr sz="1400" b="0" i="0">
-                <a:solidFill>
-                  <a:srgbClr val="D6D5DA"/>
-                </a:solidFill>
-                <a:latin typeface="DejaVu Sans"/>
-              </a:rPr>
-              <a:t>2</a:t>
-            </a:r>
-            <a:endParaRPr sz="1300" b="0" i="0">
-              <a:latin typeface="DejaVu Sans"/>
-            </a:endParaRPr>
-          </a:p>
-        </p:txBody>
-      </p:sp>
-      <p:sp>
-        <p:nvSpPr>
-          <p:cNvPr id="16" name="TextBox 15"/>
-          <p:cNvSpPr txBox="1"/>
-          <p:nvPr/>
-        </p:nvSpPr>
-        <p:spPr>
-          <a:xfrm>
-            <a:off x="13703300" y="3695700"/>
-            <a:ext cx="1555750" cy="190500"/>
-          </a:xfrm>
-          <a:prstGeom prst="rect">
-            <a:avLst/>
-          </a:prstGeom>
-          <a:noFill/>
-        </p:spPr>
-        <p:txBody>
-          <a:bodyPr wrap="square" lIns="0" rIns="0" tIns="0" bIns="0">
-            <a:noAutofit/>
-          </a:bodyPr>
-          <a:lstStyle/>
-          <a:p>
-            <a:pPr algn="l"/>
-            <a:r>
-              <a:rPr sz="1000" b="0" i="0">
-                <a:solidFill>
-                  <a:srgbClr val="777C81"/>
-                </a:solidFill>
-                <a:latin typeface="DejaVu Sans"/>
-              </a:rPr>
-              <a:t>TARGET NODE LOCKED</a:t>
-            </a:r>
-            <a:endParaRPr sz="1000" b="0" i="0">
-              <a:latin typeface="DejaVu Sans"/>
-            </a:endParaRPr>
-          </a:p>
-        </p:txBody>
-      </p:sp>
-      <p:sp>
-        <p:nvSpPr>
-          <p:cNvPr id="17" name="TextBox 16"/>
-          <p:cNvSpPr txBox="1"/>
-          <p:nvPr/>
-        </p:nvSpPr>
-        <p:spPr>
-          <a:xfrm>
-            <a:off x="2178050" y="3702050"/>
-            <a:ext cx="1435100" cy="171450"/>
-          </a:xfrm>
-          <a:prstGeom prst="rect">
-            <a:avLst/>
-          </a:prstGeom>
-          <a:noFill/>
-        </p:spPr>
-        <p:txBody>
-          <a:bodyPr wrap="square" lIns="0" rIns="0" tIns="0" bIns="0">
-            <a:noAutofit/>
-          </a:bodyPr>
-          <a:lstStyle/>
-          <a:p>
-            <a:pPr algn="l"/>
-            <a:r>
-              <a:rPr sz="1000" b="0" i="0">
-                <a:solidFill>
-                  <a:srgbClr val="7E8285"/>
-                </a:solidFill>
-                <a:latin typeface="DejaVu Sans"/>
-              </a:rPr>
-              <a:t>SENANTIC CLUSTERS</a:t>
-            </a:r>
-            <a:endParaRPr sz="1000" b="0" i="0">
-              <a:latin typeface="DejaVu Sans"/>
-            </a:endParaRPr>
-          </a:p>
-        </p:txBody>
-      </p:sp>
-      <p:sp>
-        <p:nvSpPr>
-          <p:cNvPr id="18" name="TextBox 17"/>
-          <p:cNvSpPr txBox="1"/>
-          <p:nvPr/>
-        </p:nvSpPr>
-        <p:spPr>
-          <a:xfrm>
-            <a:off x="3860800" y="3714750"/>
-            <a:ext cx="196850" cy="158750"/>
-          </a:xfrm>
-          <a:prstGeom prst="rect">
-            <a:avLst/>
-          </a:prstGeom>
-          <a:noFill/>
-        </p:spPr>
-        <p:txBody>
-          <a:bodyPr wrap="square" lIns="0" rIns="0" tIns="0" bIns="0">
-            <a:noAutofit/>
-          </a:bodyPr>
-          <a:lstStyle/>
-          <a:p>
-            <a:pPr algn="l"/>
-            <a:r>
-              <a:rPr sz="1400" b="0" i="0">
-                <a:solidFill>
-                  <a:srgbClr val="C9CDD0"/>
-                </a:solidFill>
-                <a:latin typeface="DejaVu Sans"/>
-              </a:rPr>
-              <a:t>0</a:t>
-            </a:r>
-            <a:endParaRPr sz="1300" b="0" i="0">
-              <a:latin typeface="DejaVu Sans"/>
-            </a:endParaRPr>
-          </a:p>
-        </p:txBody>
-      </p:sp>
-      <p:sp>
-        <p:nvSpPr>
-          <p:cNvPr id="19" name="TextBox 18"/>
-          <p:cNvSpPr txBox="1"/>
-          <p:nvPr/>
-        </p:nvSpPr>
-        <p:spPr>
-          <a:xfrm>
-            <a:off x="13442950" y="3727450"/>
-            <a:ext cx="177800" cy="133350"/>
-          </a:xfrm>
-          <a:prstGeom prst="rect">
-            <a:avLst/>
-          </a:prstGeom>
-          <a:noFill/>
-        </p:spPr>
-        <p:txBody>
-          <a:bodyPr wrap="square" lIns="0" rIns="0" tIns="0" bIns="0">
-            <a:noAutofit/>
-          </a:bodyPr>
-          <a:lstStyle/>
-          <a:p>
-            <a:pPr algn="l"/>
-            <a:r>
-              <a:rPr sz="1150" b="0" i="0">
-                <a:solidFill>
-                  <a:srgbClr val="C6CBD1"/>
-                </a:solidFill>
-                <a:latin typeface="DejaVu Sans"/>
-              </a:rPr>
-              <a:t>0</a:t>
-            </a:r>
-            <a:endParaRPr sz="1100" b="0" i="0">
-              <a:latin typeface="DejaVu Sans"/>
-            </a:endParaRPr>
-          </a:p>
-        </p:txBody>
-      </p:sp>
-      <p:sp>
-        <p:nvSpPr>
-          <p:cNvPr id="20" name="TextBox 19"/>
-          <p:cNvSpPr txBox="1"/>
-          <p:nvPr/>
-        </p:nvSpPr>
-        <p:spPr>
-          <a:xfrm>
-            <a:off x="3879850" y="4362450"/>
-            <a:ext cx="127000" cy="114300"/>
-          </a:xfrm>
-          <a:prstGeom prst="rect">
-            <a:avLst/>
-          </a:prstGeom>
-          <a:noFill/>
-        </p:spPr>
-        <p:txBody>
-          <a:bodyPr wrap="square" lIns="0" rIns="0" tIns="0" bIns="0">
-            <a:noAutofit/>
-          </a:bodyPr>
-          <a:lstStyle/>
-          <a:p>
-            <a:pPr algn="l"/>
-            <a:r>
-              <a:rPr sz="1050" b="0" i="0">
-                <a:solidFill>
-                  <a:srgbClr val="D4D8DB"/>
-                </a:solidFill>
-                <a:latin typeface="Noto Sans CJK TC"/>
-              </a:rPr>
-              <a:t>-2</a:t>
-            </a:r>
-            <a:endParaRPr sz="800" b="0" i="0">
-              <a:latin typeface="Noto Sans CJK TC"/>
-            </a:endParaRPr>
-          </a:p>
-        </p:txBody>
-      </p:sp>
-      <p:sp>
-        <p:nvSpPr>
-          <p:cNvPr id="21" name="TextBox 20"/>
-          <p:cNvSpPr txBox="1"/>
-          <p:nvPr/>
-        </p:nvSpPr>
-        <p:spPr>
-          <a:xfrm>
-            <a:off x="11645900" y="4457700"/>
-            <a:ext cx="190500" cy="152400"/>
-          </a:xfrm>
-          <a:prstGeom prst="rect">
-            <a:avLst/>
-          </a:prstGeom>
-          <a:noFill/>
-        </p:spPr>
-        <p:txBody>
-          <a:bodyPr wrap="square" lIns="0" rIns="0" tIns="0" bIns="0">
-            <a:noAutofit/>
-          </a:bodyPr>
-          <a:lstStyle/>
-          <a:p>
-            <a:pPr algn="l"/>
-            <a:r>
-              <a:rPr sz="1100" b="0" i="0">
-                <a:solidFill>
-                  <a:srgbClr val="D0CEBD"/>
-                </a:solidFill>
-                <a:latin typeface="DejaVu Sans"/>
-              </a:rPr>
-              <a:t>AC</a:t>
-            </a:r>
-            <a:endParaRPr sz="1000" b="0" i="0">
-              <a:latin typeface="DejaVu Sans"/>
-            </a:endParaRPr>
-          </a:p>
-        </p:txBody>
-      </p:sp>
-      <p:sp>
-        <p:nvSpPr>
-          <p:cNvPr id="22" name="TextBox 21"/>
-          <p:cNvSpPr txBox="1"/>
-          <p:nvPr/>
-        </p:nvSpPr>
-        <p:spPr>
-          <a:xfrm>
-            <a:off x="13735050" y="4730750"/>
-            <a:ext cx="1524000" cy="190500"/>
-          </a:xfrm>
-          <a:prstGeom prst="rect">
-            <a:avLst/>
-          </a:prstGeom>
-          <a:noFill/>
-        </p:spPr>
-        <p:txBody>
-          <a:bodyPr wrap="square" lIns="0" rIns="0" tIns="0" bIns="0">
-            <a:noAutofit/>
-          </a:bodyPr>
-          <a:lstStyle/>
-          <a:p>
-            <a:pPr algn="l"/>
-            <a:r>
-              <a:rPr sz="1000" b="0" i="0">
-                <a:solidFill>
-                  <a:srgbClr val="73787E"/>
-                </a:solidFill>
-                <a:latin typeface="DejaVu Sans"/>
-              </a:rPr>
-              <a:t>TARGET NODE LOCKED</a:t>
-            </a:r>
-            <a:endParaRPr sz="900" b="0" i="0">
-              <a:latin typeface="DejaVu Sans"/>
-            </a:endParaRPr>
-          </a:p>
-        </p:txBody>
-      </p:sp>
-      <p:sp>
-        <p:nvSpPr>
-          <p:cNvPr id="23" name="TextBox 22"/>
-          <p:cNvSpPr txBox="1"/>
-          <p:nvPr/>
-        </p:nvSpPr>
-        <p:spPr>
-          <a:xfrm>
-            <a:off x="2171700" y="4768850"/>
-            <a:ext cx="1441450" cy="190500"/>
-          </a:xfrm>
-          <a:prstGeom prst="rect">
-            <a:avLst/>
-          </a:prstGeom>
-          <a:noFill/>
-        </p:spPr>
-        <p:txBody>
-          <a:bodyPr wrap="square" lIns="0" rIns="0" tIns="0" bIns="0">
-            <a:noAutofit/>
-          </a:bodyPr>
-          <a:lstStyle/>
-          <a:p>
-            <a:pPr algn="l"/>
-            <a:r>
-              <a:rPr sz="1000" b="0" i="0">
-                <a:solidFill>
-                  <a:srgbClr val="76797C"/>
-                </a:solidFill>
-                <a:latin typeface="DejaVu Sans"/>
-              </a:rPr>
-              <a:t>VECTOR EMBEDDINGS</a:t>
-            </a:r>
-            <a:endParaRPr sz="900" b="0" i="0">
-              <a:latin typeface="DejaVu Sans"/>
-            </a:endParaRPr>
-          </a:p>
-        </p:txBody>
-      </p:sp>
-      <p:sp>
-        <p:nvSpPr>
-          <p:cNvPr id="24" name="TextBox 23"/>
-          <p:cNvSpPr txBox="1"/>
-          <p:nvPr/>
-        </p:nvSpPr>
-        <p:spPr>
-          <a:xfrm>
-            <a:off x="11664950" y="5086350"/>
-            <a:ext cx="165100" cy="139700"/>
-          </a:xfrm>
-          <a:prstGeom prst="rect">
-            <a:avLst/>
-          </a:prstGeom>
-          <a:noFill/>
-        </p:spPr>
-        <p:txBody>
-          <a:bodyPr wrap="square" lIns="0" rIns="0" tIns="0" bIns="0">
-            <a:noAutofit/>
-          </a:bodyPr>
-          <a:lstStyle/>
-          <a:p>
-            <a:pPr algn="l"/>
-            <a:r>
-              <a:rPr sz="1250" b="0" i="0">
-                <a:solidFill>
-                  <a:srgbClr val="D2D2BE"/>
-                </a:solidFill>
-                <a:latin typeface="DejaVu Sans"/>
-              </a:rPr>
-              <a:t>M</a:t>
-            </a:r>
-            <a:endParaRPr sz="1100" b="0" i="0">
-              <a:latin typeface="DejaVu Sans"/>
-            </a:endParaRPr>
-          </a:p>
-        </p:txBody>
-      </p:sp>
-      <p:sp>
-        <p:nvSpPr>
-          <p:cNvPr id="25" name="TextBox 24"/>
-          <p:cNvSpPr txBox="1"/>
-          <p:nvPr/>
-        </p:nvSpPr>
-        <p:spPr>
-          <a:xfrm>
-            <a:off x="2819400" y="5130800"/>
-            <a:ext cx="806450" cy="196850"/>
-          </a:xfrm>
-          <a:prstGeom prst="rect">
-            <a:avLst/>
-          </a:prstGeom>
-          <a:noFill/>
-        </p:spPr>
-        <p:txBody>
-          <a:bodyPr wrap="square" lIns="0" rIns="0" tIns="0" bIns="0">
-            <a:noAutofit/>
-          </a:bodyPr>
-          <a:lstStyle/>
-          <a:p>
-            <a:pPr algn="l"/>
-            <a:r>
-              <a:rPr sz="1350" b="0" i="0">
-                <a:solidFill>
-                  <a:srgbClr val="828689"/>
-                </a:solidFill>
-                <a:latin typeface="DejaVu Sans"/>
-              </a:rPr>
-              <a:t>Fira Code</a:t>
-            </a:r>
-            <a:endParaRPr sz="1200" b="0" i="0">
-              <a:latin typeface="DejaVu Sans"/>
-            </a:endParaRPr>
-          </a:p>
-        </p:txBody>
-      </p:sp>
-      <p:sp>
-        <p:nvSpPr>
-          <p:cNvPr id="26" name="TextBox 25"/>
-          <p:cNvSpPr txBox="1"/>
-          <p:nvPr/>
-        </p:nvSpPr>
-        <p:spPr>
-          <a:xfrm>
-            <a:off x="10236200" y="5270500"/>
-            <a:ext cx="234950" cy="146050"/>
-          </a:xfrm>
-          <a:prstGeom prst="rect">
-            <a:avLst/>
-          </a:prstGeom>
-          <a:noFill/>
-        </p:spPr>
-        <p:txBody>
-          <a:bodyPr wrap="square" lIns="0" rIns="0" tIns="0" bIns="0">
-            <a:noAutofit/>
-          </a:bodyPr>
-          <a:lstStyle/>
-          <a:p>
-            <a:pPr algn="l"/>
-            <a:r>
-              <a:rPr sz="1300" b="0" i="0">
-                <a:solidFill>
-                  <a:srgbClr val="D2D1C1"/>
-                </a:solidFill>
-                <a:latin typeface="DejaVu Sans"/>
-              </a:rPr>
-              <a:t>RA</a:t>
-            </a:r>
-            <a:endParaRPr sz="1100" b="0" i="0">
-              <a:latin typeface="DejaVu Sans"/>
-            </a:endParaRPr>
-          </a:p>
-        </p:txBody>
-      </p:sp>
-      <p:sp>
-        <p:nvSpPr>
-          <p:cNvPr id="27" name="TextBox 26"/>
-          <p:cNvSpPr txBox="1"/>
-          <p:nvPr/>
-        </p:nvSpPr>
-        <p:spPr>
-          <a:xfrm>
-            <a:off x="13468350" y="5340350"/>
-            <a:ext cx="273050" cy="171450"/>
-          </a:xfrm>
-          <a:prstGeom prst="rect">
-            <a:avLst/>
-          </a:prstGeom>
-          <a:noFill/>
-        </p:spPr>
-        <p:txBody>
-          <a:bodyPr wrap="square" lIns="0" rIns="0" tIns="0" bIns="0">
-            <a:noAutofit/>
-          </a:bodyPr>
-          <a:lstStyle/>
-          <a:p>
-            <a:pPr algn="l"/>
-            <a:r>
-              <a:rPr sz="1400" b="0" i="0">
-                <a:solidFill>
-                  <a:srgbClr val="CACED4"/>
-                </a:solidFill>
-                <a:latin typeface="Noto Sans CJK TC"/>
-              </a:rPr>
-              <a:t>-10</a:t>
-            </a:r>
-            <a:endParaRPr sz="1300" b="0" i="0">
-              <a:latin typeface="Noto Sans CJK TC"/>
-            </a:endParaRPr>
-          </a:p>
-        </p:txBody>
-      </p:sp>
-      <p:sp>
-        <p:nvSpPr>
-          <p:cNvPr id="28" name="TextBox 27"/>
-          <p:cNvSpPr txBox="1"/>
-          <p:nvPr/>
-        </p:nvSpPr>
-        <p:spPr>
-          <a:xfrm>
-            <a:off x="11645900" y="5638800"/>
-            <a:ext cx="190500" cy="158750"/>
-          </a:xfrm>
-          <a:prstGeom prst="rect">
-            <a:avLst/>
-          </a:prstGeom>
-          <a:noFill/>
-        </p:spPr>
-        <p:txBody>
-          <a:bodyPr wrap="square" lIns="0" rIns="0" tIns="0" bIns="0">
-            <a:noAutofit/>
-          </a:bodyPr>
-          <a:lstStyle/>
-          <a:p>
-            <a:pPr algn="l"/>
-            <a:r>
-              <a:rPr sz="1000" b="0" i="0">
-                <a:solidFill>
-                  <a:srgbClr val="CDC7B5"/>
-                </a:solidFill>
-                <a:latin typeface="DejaVu Sans"/>
-              </a:rPr>
-              <a:t>RO</a:t>
-            </a:r>
-            <a:endParaRPr sz="900" b="0" i="0">
-              <a:latin typeface="DejaVu Sans"/>
-            </a:endParaRPr>
-          </a:p>
-        </p:txBody>
-      </p:sp>
-      <p:sp>
-        <p:nvSpPr>
-          <p:cNvPr id="29" name="TextBox 28"/>
-          <p:cNvSpPr txBox="1"/>
-          <p:nvPr/>
-        </p:nvSpPr>
-        <p:spPr>
-          <a:xfrm>
-            <a:off x="9302750" y="5829300"/>
-            <a:ext cx="1536700" cy="190500"/>
-          </a:xfrm>
-          <a:prstGeom prst="rect">
-            <a:avLst/>
-          </a:prstGeom>
-          <a:noFill/>
-        </p:spPr>
-        <p:txBody>
-          <a:bodyPr wrap="square" lIns="0" rIns="0" tIns="0" bIns="0">
-            <a:noAutofit/>
-          </a:bodyPr>
-          <a:lstStyle/>
-          <a:p>
-            <a:pPr algn="l"/>
-            <a:r>
-              <a:rPr sz="1000" b="0" i="0">
-                <a:solidFill>
-                  <a:srgbClr val="72757A"/>
-                </a:solidFill>
-                <a:latin typeface="DejaVu Sans"/>
-              </a:rPr>
-              <a:t>CONTEXTUAL ROUTING</a:t>
-            </a:r>
-            <a:endParaRPr sz="900" b="0" i="0">
-              <a:latin typeface="DejaVu Sans"/>
-            </a:endParaRPr>
-          </a:p>
-        </p:txBody>
-      </p:sp>
-      <p:sp>
-        <p:nvSpPr>
           <p:cNvPr id="30" name="TextBox 29"/>
           <p:cNvSpPr txBox="1"/>
           <p:nvPr/>
@@ -4164,7 +4164,7 @@
           <a:p>
             <a:pPr algn="l"/>
             <a:r>
-              <a:rPr sz="1300" b="0" i="0">
+              <a:rPr sz="1200" b="1" i="0">
                 <a:solidFill>
                   <a:srgbClr val="D0D4D7"/>
                 </a:solidFill>
@@ -4172,7 +4172,7 @@
               </a:rPr>
               <a:t>10</a:t>
             </a:r>
-            <a:endParaRPr sz="1200" b="0" i="0">
+            <a:endParaRPr sz="1200" b="1" i="0">
               <a:latin typeface="DejaVu Sans"/>
             </a:endParaRPr>
           </a:p>
@@ -4202,7 +4202,7 @@
           <a:p>
             <a:pPr algn="l"/>
             <a:r>
-              <a:rPr sz="1000" b="0" i="0">
+              <a:rPr sz="900" b="1" i="0">
                 <a:solidFill>
                   <a:srgbClr val="CBD0D6"/>
                 </a:solidFill>
@@ -4210,7 +4210,7 @@
               </a:rPr>
               <a:t>15</a:t>
             </a:r>
-            <a:endParaRPr sz="900" b="0" i="0">
+            <a:endParaRPr sz="900" b="1" i="0">
               <a:latin typeface="DejaVu Sans"/>
             </a:endParaRPr>
           </a:p>
@@ -4240,7 +4240,7 @@
           <a:p>
             <a:pPr algn="l"/>
             <a:r>
-              <a:rPr sz="900" b="0" i="0">
+              <a:rPr sz="800" b="1" i="0">
                 <a:solidFill>
                   <a:srgbClr val="C7CCCF"/>
                 </a:solidFill>
@@ -4248,7 +4248,7 @@
               </a:rPr>
               <a:t>6</a:t>
             </a:r>
-            <a:endParaRPr sz="800" b="0" i="0">
+            <a:endParaRPr sz="800" b="1" i="0">
               <a:latin typeface="DejaVu Sans"/>
             </a:endParaRPr>
           </a:p>
@@ -4278,7 +4278,7 @@
           <a:p>
             <a:pPr algn="l"/>
             <a:r>
-              <a:rPr sz="4800" b="0" i="0">
+              <a:rPr sz="4800" b="1" i="0">
                 <a:solidFill>
                   <a:srgbClr val="1D232B"/>
                 </a:solidFill>
@@ -4286,7 +4286,7 @@
               </a:rPr>
               <a:t>RAG 2026：當向量搜尋遇上代理推理</a:t>
             </a:r>
-            <a:endParaRPr sz="5500" b="0" i="0">
+            <a:endParaRPr sz="4800" b="1" i="0">
               <a:latin typeface="Noto Sans CJK TC"/>
             </a:endParaRPr>
           </a:p>
@@ -4316,7 +4316,7 @@
           <a:p>
             <a:pPr algn="l"/>
             <a:r>
-              <a:rPr sz="3700" b="0" i="0">
+              <a:rPr sz="3600" b="1" i="0">
                 <a:solidFill>
                   <a:srgbClr val="34383E"/>
                 </a:solidFill>
@@ -4324,7 +4324,7 @@
               </a:rPr>
               <a:t>企業級 99%準確度AI架構的演進與實踐指南</a:t>
             </a:r>
-            <a:endParaRPr sz="3600" b="0" i="0">
+            <a:endParaRPr sz="3600" b="1" i="0">
               <a:latin typeface="Noto Sans CJK TC"/>
             </a:endParaRPr>
           </a:p>
@@ -4354,15 +4354,15 @@
           <a:p>
             <a:pPr algn="l"/>
             <a:r>
-              <a:rPr sz="1350" b="0" i="0">
-                <a:solidFill>
-                  <a:srgbClr val="4A4D54"/>
+              <a:rPr sz="1200" b="1" i="0">
+                <a:solidFill>
+                  <a:srgbClr val="4A4E55"/>
                 </a:solidFill>
                 <a:latin typeface="DejaVu Sans"/>
               </a:rPr>
               <a:t>NotebookLM</a:t>
             </a:r>
-            <a:endParaRPr sz="1200" b="0" i="0">
+            <a:endParaRPr sz="1200" b="1" i="0">
               <a:latin typeface="DejaVu Sans"/>
             </a:endParaRPr>
           </a:p>
@@ -4434,7 +4434,7 @@
           <a:p>
             <a:pPr algn="l"/>
             <a:r>
-              <a:rPr sz="4700" b="0" i="0">
+              <a:rPr sz="4500" b="1" i="0">
                 <a:solidFill>
                   <a:srgbClr val="1E1F1F"/>
                 </a:solidFill>
@@ -4442,7 +4442,7 @@
               </a:rPr>
               <a:t>「上下文盲視」揭示了 RAG1.0建立在脆弱的統計假象之上</a:t>
             </a:r>
-            <a:endParaRPr sz="4500" b="0" i="0">
+            <a:endParaRPr sz="4500" b="1" i="0">
               <a:latin typeface="Noto Sans CJK TC"/>
             </a:endParaRPr>
           </a:p>
@@ -4472,9 +4472,9 @@
           <a:p>
             <a:pPr algn="l"/>
             <a:r>
-              <a:rPr sz="2600" b="0" i="0">
-                <a:solidFill>
-                  <a:srgbClr val="232425"/>
+              <a:rPr sz="2500" b="0" i="0">
+                <a:solidFill>
+                  <a:srgbClr val="242525"/>
                 </a:solidFill>
                 <a:latin typeface="DejaVu Sans"/>
               </a:rPr>
@@ -4518,7 +4518,7 @@
               </a:rPr>
               <a:t>中</a:t>
             </a:r>
-            <a:endParaRPr sz="1300" b="0" i="0">
+            <a:endParaRPr sz="1200" b="0" i="0">
               <a:latin typeface="Noto Sans CJK TC"/>
             </a:endParaRPr>
           </a:p>
@@ -4548,7 +4548,7 @@
           <a:p>
             <a:pPr algn="l"/>
             <a:r>
-              <a:rPr sz="1250" b="0" i="0">
+              <a:rPr sz="1200" b="0" i="0">
                 <a:solidFill>
                   <a:srgbClr val="B2B7BD"/>
                 </a:solidFill>
@@ -4556,7 +4556,7 @@
               </a:rPr>
               <a:t>中</a:t>
             </a:r>
-            <a:endParaRPr sz="1300" b="0" i="0">
+            <a:endParaRPr sz="1200" b="0" i="0">
               <a:latin typeface="Noto Sans CJK TC"/>
             </a:endParaRPr>
           </a:p>
@@ -4586,7 +4586,7 @@
           <a:p>
             <a:pPr algn="l"/>
             <a:r>
-              <a:rPr sz="2600" b="0" i="0">
+              <a:rPr sz="2300" b="0" i="0">
                 <a:solidFill>
                   <a:srgbClr val="5F6A76"/>
                 </a:solidFill>
@@ -4624,7 +4624,7 @@
           <a:p>
             <a:pPr algn="l"/>
             <a:r>
-              <a:rPr sz="3300" b="0" i="0">
+              <a:rPr sz="3100" b="0" i="0">
                 <a:solidFill>
                   <a:srgbClr val="F0F0F0"/>
                 </a:solidFill>
@@ -4662,9 +4662,9 @@
           <a:p>
             <a:pPr algn="l"/>
             <a:r>
-              <a:rPr sz="3150" b="0" i="0">
-                <a:solidFill>
-                  <a:srgbClr val="E4EDF2"/>
+              <a:rPr sz="3100" b="0" i="0">
+                <a:solidFill>
+                  <a:srgbClr val="E4EDF3"/>
                 </a:solidFill>
                 <a:latin typeface="Noto Sans CJK TC"/>
               </a:rPr>
@@ -4700,7 +4700,7 @@
           <a:p>
             <a:pPr algn="l"/>
             <a:r>
-              <a:rPr sz="2450" b="0" i="0">
+              <a:rPr sz="2300" b="0" i="0">
                 <a:solidFill>
                   <a:srgbClr val="2A261E"/>
                 </a:solidFill>
@@ -4738,7 +4738,7 @@
           <a:p>
             <a:pPr algn="l"/>
             <a:r>
-              <a:rPr sz="2350" b="0" i="0">
+              <a:rPr sz="2100" b="0" i="0">
                 <a:solidFill>
                   <a:srgbClr val="2C2C2C"/>
                 </a:solidFill>
@@ -4776,9 +4776,9 @@
           <a:p>
             <a:pPr algn="l"/>
             <a:r>
-              <a:rPr sz="2550" b="0" i="0">
-                <a:solidFill>
-                  <a:srgbClr val="4A4A4A"/>
+              <a:rPr sz="2300" b="0" i="0">
+                <a:solidFill>
+                  <a:srgbClr val="494949"/>
                 </a:solidFill>
                 <a:latin typeface="Noto Sans CJK TC"/>
               </a:rPr>
@@ -4814,7 +4814,7 @@
           <a:p>
             <a:pPr algn="l"/>
             <a:r>
-              <a:rPr sz="2450" b="0" i="0">
+              <a:rPr sz="2300" b="0" i="0">
                 <a:solidFill>
                   <a:srgbClr val="4A4A4A"/>
                 </a:solidFill>
@@ -4852,7 +4852,7 @@
           <a:p>
             <a:pPr algn="l"/>
             <a:r>
-              <a:rPr sz="2000" b="0" i="0">
+              <a:rPr sz="1800" b="0" i="0">
                 <a:solidFill>
                   <a:srgbClr val="A35152"/>
                 </a:solidFill>
@@ -4890,7 +4890,7 @@
           <a:p>
             <a:pPr algn="l"/>
             <a:r>
-              <a:rPr sz="2300" b="0" i="0">
+              <a:rPr sz="2100" b="0" i="0">
                 <a:solidFill>
                   <a:srgbClr val="4A4A4A"/>
                 </a:solidFill>
@@ -4928,7 +4928,7 @@
           <a:p>
             <a:pPr algn="l"/>
             <a:r>
-              <a:rPr sz="1350" b="0" i="0">
+              <a:rPr sz="1200" b="0" i="0">
                 <a:solidFill>
                   <a:srgbClr val="56595C"/>
                 </a:solidFill>
@@ -4966,7 +4966,7 @@
           <a:p>
             <a:pPr algn="l"/>
             <a:r>
-              <a:rPr sz="2400" b="0" i="0">
+              <a:rPr sz="2200" b="0" i="0">
                 <a:solidFill>
                   <a:srgbClr val="464646"/>
                 </a:solidFill>
@@ -5004,7 +5004,7 @@
           <a:p>
             <a:pPr algn="l"/>
             <a:r>
-              <a:rPr sz="2350" b="0" i="0">
+              <a:rPr sz="2100" b="0" i="0">
                 <a:solidFill>
                   <a:srgbClr val="353535"/>
                 </a:solidFill>
@@ -5042,7 +5042,7 @@
           <a:p>
             <a:pPr algn="l"/>
             <a:r>
-              <a:rPr sz="2300" b="0" i="0">
+              <a:rPr sz="2100" b="0" i="0">
                 <a:solidFill>
                   <a:srgbClr val="2C2C2C"/>
                 </a:solidFill>
@@ -5080,7 +5080,7 @@
           <a:p>
             <a:pPr algn="l"/>
             <a:r>
-              <a:rPr sz="2350" b="0" i="0">
+              <a:rPr sz="2100" b="0" i="0">
                 <a:solidFill>
                   <a:srgbClr val="404040"/>
                 </a:solidFill>
@@ -5118,9 +5118,9 @@
           <a:p>
             <a:pPr algn="l"/>
             <a:r>
-              <a:rPr sz="2450" b="0" i="0">
-                <a:solidFill>
-                  <a:srgbClr val="2E2A24"/>
+              <a:rPr sz="2200" b="0" i="0">
+                <a:solidFill>
+                  <a:srgbClr val="2E2B24"/>
                 </a:solidFill>
                 <a:latin typeface="Noto Sans CJK TC"/>
               </a:rPr>
@@ -5156,7 +5156,7 @@
           <a:p>
             <a:pPr algn="l"/>
             <a:r>
-              <a:rPr sz="2400" b="0" i="0">
+              <a:rPr sz="2200" b="0" i="0">
                 <a:solidFill>
                   <a:srgbClr val="2D2D2D"/>
                 </a:solidFill>
@@ -5194,7 +5194,7 @@
           <a:p>
             <a:pPr algn="l"/>
             <a:r>
-              <a:rPr sz="2150" b="0" i="0">
+              <a:rPr sz="2000" b="0" i="0">
                 <a:solidFill>
                   <a:srgbClr val="27221A"/>
                 </a:solidFill>
@@ -5232,15 +5232,15 @@
           <a:p>
             <a:pPr algn="l"/>
             <a:r>
-              <a:rPr sz="1350" b="0" i="0">
-                <a:solidFill>
-                  <a:srgbClr val="4A4E53"/>
+              <a:rPr sz="1300" b="1" i="0">
+                <a:solidFill>
+                  <a:srgbClr val="484D52"/>
                 </a:solidFill>
                 <a:latin typeface="DejaVu Sans"/>
               </a:rPr>
               <a:t>NotebookLM</a:t>
             </a:r>
-            <a:endParaRPr sz="1300" b="0" i="0">
+            <a:endParaRPr sz="1300" b="1" i="0">
               <a:latin typeface="DejaVu Sans"/>
             </a:endParaRPr>
           </a:p>
@@ -5312,7 +5312,7 @@
           <a:p>
             <a:pPr algn="l"/>
             <a:r>
-              <a:rPr sz="4750" b="0" i="0">
+              <a:rPr sz="4700" b="1" i="0">
                 <a:solidFill>
                   <a:srgbClr val="070707"/>
                 </a:solidFill>
@@ -5320,7 +5320,7 @@
               </a:rPr>
               <a:t>向量資料庫依然是處理千萬級數據的極速堡壘</a:t>
             </a:r>
-            <a:endParaRPr sz="4700" b="0" i="0">
+            <a:endParaRPr sz="4700" b="1" i="0">
               <a:latin typeface="Noto Sans CJK TC"/>
             </a:endParaRPr>
           </a:p>
@@ -5350,7 +5350,7 @@
           <a:p>
             <a:pPr algn="l"/>
             <a:r>
-              <a:rPr sz="2950" b="0" i="0">
+              <a:rPr sz="2700" b="0" i="0">
                 <a:solidFill>
                   <a:srgbClr val="222223"/>
                 </a:solidFill>
@@ -5388,7 +5388,7 @@
           <a:p>
             <a:pPr algn="l"/>
             <a:r>
-              <a:rPr sz="2850" b="0" i="0">
+              <a:rPr sz="2600" b="0" i="0">
                 <a:solidFill>
                   <a:srgbClr val="1E1E1E"/>
                 </a:solidFill>
@@ -5426,7 +5426,7 @@
           <a:p>
             <a:pPr algn="l"/>
             <a:r>
-              <a:rPr sz="2950" b="0" i="0">
+              <a:rPr sz="2700" b="0" i="0">
                 <a:solidFill>
                   <a:srgbClr val="1B1B1B"/>
                 </a:solidFill>
@@ -5464,7 +5464,7 @@
           <a:p>
             <a:pPr algn="l"/>
             <a:r>
-              <a:rPr sz="2650" b="0" i="0">
+              <a:rPr sz="2500" b="0" i="0">
                 <a:solidFill>
                   <a:srgbClr val="343434"/>
                 </a:solidFill>
@@ -5502,7 +5502,7 @@
           <a:p>
             <a:pPr algn="l"/>
             <a:r>
-              <a:rPr sz="2800" b="0" i="0">
+              <a:rPr sz="2600" b="0" i="0">
                 <a:solidFill>
                   <a:srgbClr val="363636"/>
                 </a:solidFill>
@@ -5540,9 +5540,9 @@
           <a:p>
             <a:pPr algn="l"/>
             <a:r>
-              <a:rPr sz="2750" b="0" i="0">
-                <a:solidFill>
-                  <a:srgbClr val="282929"/>
+              <a:rPr sz="2600" b="0" i="0">
+                <a:solidFill>
+                  <a:srgbClr val="282828"/>
                 </a:solidFill>
                 <a:latin typeface="DejaVu Sans"/>
               </a:rPr>
@@ -5578,7 +5578,7 @@
           <a:p>
             <a:pPr algn="l"/>
             <a:r>
-              <a:rPr sz="2800" b="0" i="0">
+              <a:rPr sz="2500" b="0" i="0">
                 <a:solidFill>
                   <a:srgbClr val="353636"/>
                 </a:solidFill>
@@ -5654,7 +5654,7 @@
           <a:p>
             <a:pPr algn="l"/>
             <a:r>
-              <a:rPr sz="2600" b="0" i="0">
+              <a:rPr sz="2500" b="0" i="0">
                 <a:solidFill>
                   <a:srgbClr val="292A2A"/>
                 </a:solidFill>
@@ -5692,7 +5692,7 @@
           <a:p>
             <a:pPr algn="l"/>
             <a:r>
-              <a:rPr sz="2750" b="0" i="0">
+              <a:rPr sz="2500" b="0" i="0">
                 <a:solidFill>
                   <a:srgbClr val="333333"/>
                 </a:solidFill>
@@ -5730,9 +5730,9 @@
           <a:p>
             <a:pPr algn="l"/>
             <a:r>
-              <a:rPr sz="2750" b="0" i="0">
-                <a:solidFill>
-                  <a:srgbClr val="393A3A"/>
+              <a:rPr sz="2500" b="0" i="0">
+                <a:solidFill>
+                  <a:srgbClr val="3A3A3A"/>
                 </a:solidFill>
                 <a:latin typeface="Noto Sans CJK TC"/>
               </a:rPr>
@@ -5768,7 +5768,7 @@
           <a:p>
             <a:pPr algn="l"/>
             <a:r>
-              <a:rPr sz="2650" b="0" i="0">
+              <a:rPr sz="2500" b="0" i="0">
                 <a:solidFill>
                   <a:srgbClr val="272928"/>
                 </a:solidFill>
@@ -5806,7 +5806,7 @@
           <a:p>
             <a:pPr algn="l"/>
             <a:r>
-              <a:rPr sz="2800" b="0" i="0">
+              <a:rPr sz="2700" b="0" i="0">
                 <a:solidFill>
                   <a:srgbClr val="282929"/>
                 </a:solidFill>
@@ -5844,7 +5844,7 @@
           <a:p>
             <a:pPr algn="l"/>
             <a:r>
-              <a:rPr sz="2750" b="0" i="0">
+              <a:rPr sz="2500" b="0" i="0">
                 <a:solidFill>
                   <a:srgbClr val="3C3C3C"/>
                 </a:solidFill>
@@ -5882,7 +5882,7 @@
           <a:p>
             <a:pPr algn="l"/>
             <a:r>
-              <a:rPr sz="2650" b="0" i="0">
+              <a:rPr sz="2500" b="0" i="0">
                 <a:solidFill>
                   <a:srgbClr val="353535"/>
                 </a:solidFill>
@@ -5920,7 +5920,7 @@
           <a:p>
             <a:pPr algn="l"/>
             <a:r>
-              <a:rPr sz="2750" b="0" i="0">
+              <a:rPr sz="2500" b="0" i="0">
                 <a:solidFill>
                   <a:srgbClr val="3B3B3B"/>
                 </a:solidFill>
@@ -5958,7 +5958,7 @@
           <a:p>
             <a:pPr algn="l"/>
             <a:r>
-              <a:rPr sz="2650" b="0" i="0">
+              <a:rPr sz="2500" b="0" i="0">
                 <a:solidFill>
                   <a:srgbClr val="262626"/>
                 </a:solidFill>
@@ -5996,7 +5996,7 @@
           <a:p>
             <a:pPr algn="l"/>
             <a:r>
-              <a:rPr sz="2750" b="0" i="0">
+              <a:rPr sz="2500" b="0" i="0">
                 <a:solidFill>
                   <a:srgbClr val="383838"/>
                 </a:solidFill>
@@ -6034,7 +6034,7 @@
           <a:p>
             <a:pPr algn="l"/>
             <a:r>
-              <a:rPr sz="2950" b="0" i="0">
+              <a:rPr sz="3000" b="0" i="0">
                 <a:solidFill>
                   <a:srgbClr val="18110C"/>
                 </a:solidFill>
@@ -6072,7 +6072,7 @@
           <a:p>
             <a:pPr algn="l"/>
             <a:r>
-              <a:rPr sz="2450" b="0" i="0">
+              <a:rPr sz="2200" b="0" i="0">
                 <a:solidFill>
                   <a:srgbClr val="413E37"/>
                 </a:solidFill>
@@ -6110,7 +6110,7 @@
           <a:p>
             <a:pPr algn="l"/>
             <a:r>
-              <a:rPr sz="2450" b="0" i="0">
+              <a:rPr sz="2200" b="0" i="0">
                 <a:solidFill>
                   <a:srgbClr val="413D37"/>
                 </a:solidFill>
@@ -6148,7 +6148,7 @@
           <a:p>
             <a:pPr algn="l"/>
             <a:r>
-              <a:rPr sz="1300" b="0" i="0">
+              <a:rPr sz="1200" b="1" i="0">
                 <a:solidFill>
                   <a:srgbClr val="4C4F4F"/>
                 </a:solidFill>
@@ -6156,7 +6156,7 @@
               </a:rPr>
               <a:t>NotebookLM</a:t>
             </a:r>
-            <a:endParaRPr sz="1200" b="0" i="0">
+            <a:endParaRPr sz="1200" b="1" i="0">
               <a:latin typeface="DejaVu Sans"/>
             </a:endParaRPr>
           </a:p>
